--- a/system-design-101/vi/lessons/sd-02-008/slides/sd-02-008.pptx
+++ b/system-design-101/vi/lessons/sd-02-008/slides/sd-02-008.pptx
@@ -7058,50 +7058,6 @@
               <a:t>Công cụ</a:t>
             </a:r>
             <a:r>
-              <a:rPr lang="en-US" sz="6600" dirty="0" spc="3" kern="0">
-                <a:solidFill>
-                  <a:srgbClr val="F3EEE3"/>
-                </a:solidFill>
-                <a:latin typeface="Bricolage Grotesque ExtraBold" pitchFamily="34" charset="0"/>
-                <a:ea typeface="Bricolage Grotesque ExtraBold" pitchFamily="34" charset="-122"/>
-                <a:cs typeface="Bricolage Grotesque ExtraBold" pitchFamily="34" charset="-120"/>
-              </a:rPr>
-              <a:t> Uber</a:t>
-            </a:r>
-            <a:r>
-              <a:rPr lang="en-US" sz="6600" dirty="0" spc="2" kern="0">
-                <a:solidFill>
-                  <a:srgbClr val="F3EEE3"/>
-                </a:solidFill>
-                <a:latin typeface="Bricolage Grotesque ExtraBold" pitchFamily="34" charset="0"/>
-                <a:ea typeface="Bricolage Grotesque ExtraBold" pitchFamily="34" charset="-122"/>
-                <a:cs typeface="Bricolage Grotesque ExtraBold" pitchFamily="34" charset="-120"/>
-              </a:rPr>
-              <a:t> tự</a:t>
-            </a:r>
-            <a:r>
-              <a:rPr lang="en-US" sz="6600" dirty="0" spc="-1" kern="0">
-                <a:solidFill>
-                  <a:srgbClr val="F3EEE3"/>
-                </a:solidFill>
-                <a:latin typeface="Bricolage Grotesque ExtraBold" pitchFamily="34" charset="0"/>
-                <a:ea typeface="Bricolage Grotesque ExtraBold" pitchFamily="34" charset="-122"/>
-                <a:cs typeface="Bricolage Grotesque ExtraBold" pitchFamily="34" charset="-120"/>
-              </a:rPr>
-              <a:t> viết</a:t>
-            </a:r>
-            <a:r>
-              <a:rPr lang="en-US" sz="6600" dirty="0" spc="15" kern="0">
-                <a:solidFill>
-                  <a:srgbClr val="F3EEE3"/>
-                </a:solidFill>
-                <a:latin typeface="Bricolage Grotesque ExtraBold" pitchFamily="34" charset="0"/>
-                <a:ea typeface="Bricolage Grotesque ExtraBold" pitchFamily="34" charset="-122"/>
-                <a:cs typeface="Bricolage Grotesque ExtraBold" pitchFamily="34" charset="-120"/>
-              </a:rPr>
-              <a:t> để</a:t>
-            </a:r>
-            <a:r>
               <a:rPr lang="en-US" sz="6600" dirty="0" spc="-1" kern="0">
                 <a:solidFill>
                   <a:srgbClr val="F3EEE3"/>
@@ -8043,7 +7999,7 @@
               <a:buNone/>
             </a:pPr>
             <a:r>
-              <a:rPr lang="en-US" sz="2250" dirty="0" spc="-1" kern="0">
+              <a:rPr lang="en-US" sz="2250" dirty="0" spc="0" kern="0">
                 <a:solidFill>
                   <a:srgbClr val="C4C8D6"/>
                 </a:solidFill>
@@ -8051,10 +8007,10 @@
                 <a:ea typeface="Be Vietnam Pro" pitchFamily="34" charset="-122"/>
                 <a:cs typeface="Be Vietnam Pro" pitchFamily="34" charset="-120"/>
               </a:rPr>
-              <a:t>Ba</a:t>
-            </a:r>
-            <a:r>
-              <a:rPr lang="en-US" sz="2250" dirty="0" spc="0" kern="0">
+              <a:t>Nguồn</a:t>
+            </a:r>
+            <a:r>
+              <a:rPr lang="en-US" sz="2250" dirty="0" spc="1" kern="0">
                 <a:solidFill>
                   <a:srgbClr val="C4C8D6"/>
                 </a:solidFill>
@@ -8062,10 +8018,10 @@
                 <a:ea typeface="Be Vietnam Pro" pitchFamily="34" charset="-122"/>
                 <a:cs typeface="Be Vietnam Pro" pitchFamily="34" charset="-120"/>
               </a:rPr>
-              <a:t> thẻ</a:t>
-            </a:r>
-            <a:r>
-              <a:rPr lang="en-US" sz="2250" dirty="0" spc="10" kern="0">
+              <a:t> không nói</a:t>
+            </a:r>
+            <a:r>
+              <a:rPr lang="en-US" sz="2250" dirty="0" spc="-2" kern="0">
                 <a:solidFill>
                   <a:srgbClr val="C4C8D6"/>
                 </a:solidFill>
@@ -8073,10 +8029,10 @@
                 <a:ea typeface="Be Vietnam Pro" pitchFamily="34" charset="-122"/>
                 <a:cs typeface="Be Vietnam Pro" pitchFamily="34" charset="-120"/>
               </a:rPr>
-              <a:t> đầu:</a:t>
-            </a:r>
-            <a:r>
-              <a:rPr lang="en-US" sz="2250" dirty="0" spc="-3" kern="0">
+              <a:t> ai</a:t>
+            </a:r>
+            <a:r>
+              <a:rPr lang="en-US" sz="2250" dirty="0" spc="-7" kern="0">
                 <a:solidFill>
                   <a:srgbClr val="C4C8D6"/>
                 </a:solidFill>
@@ -8084,7 +8040,29 @@
                 <a:ea typeface="Be Vietnam Pro" pitchFamily="34" charset="-122"/>
                 <a:cs typeface="Be Vietnam Pro" pitchFamily="34" charset="-120"/>
               </a:rPr>
-              <a:t> Uber</a:t>
+              <a:t> viết</a:t>
+            </a:r>
+            <a:r>
+              <a:rPr lang="en-US" sz="2250" dirty="0" spc="-2" kern="0">
+                <a:solidFill>
+                  <a:srgbClr val="C4C8D6"/>
+                </a:solidFill>
+                <a:latin typeface="Be Vietnam Pro" pitchFamily="34" charset="0"/>
+                <a:ea typeface="Be Vietnam Pro" pitchFamily="34" charset="-122"/>
+                <a:cs typeface="Be Vietnam Pro" pitchFamily="34" charset="-120"/>
+              </a:rPr>
+              <a:t> ba</a:t>
+            </a:r>
+            <a:r>
+              <a:rPr lang="en-US" sz="2250" dirty="0" spc="3" kern="0">
+                <a:solidFill>
+                  <a:srgbClr val="C4C8D6"/>
+                </a:solidFill>
+                <a:latin typeface="Be Vietnam Pro" pitchFamily="34" charset="0"/>
+                <a:ea typeface="Be Vietnam Pro" pitchFamily="34" charset="-122"/>
+                <a:cs typeface="Be Vietnam Pro" pitchFamily="34" charset="-120"/>
+              </a:rPr>
+              <a:t> công</a:t>
             </a:r>
             <a:r>
               <a:rPr lang="en-US" sz="2250" dirty="0" spc="4" kern="0">
@@ -8095,10 +8073,10 @@
                 <a:ea typeface="Be Vietnam Pro" pitchFamily="34" charset="-122"/>
                 <a:cs typeface="Be Vietnam Pro" pitchFamily="34" charset="-120"/>
               </a:rPr>
-              <a:t> tự</a:t>
-            </a:r>
-            <a:r>
-              <a:rPr lang="en-US" sz="2250" dirty="0" spc="0" kern="0">
+              <a:t> cụ</a:t>
+            </a:r>
+            <a:r>
+              <a:rPr lang="en-US" sz="2250" dirty="0" spc="-5" kern="0">
                 <a:solidFill>
                   <a:srgbClr val="C4C8D6"/>
                 </a:solidFill>
@@ -8106,7 +8084,7 @@
                 <a:ea typeface="Be Vietnam Pro" pitchFamily="34" charset="-122"/>
                 <a:cs typeface="Be Vietnam Pro" pitchFamily="34" charset="-120"/>
               </a:rPr>
-              <a:t> làm.</a:t>
+              <a:t> này.</a:t>
             </a:r>
             <a:r>
               <a:rPr lang="en-US" sz="2250" dirty="0" spc="-2" kern="0">
@@ -8128,54 +8106,10 @@
                 <a:ea typeface="Be Vietnam Pro" pitchFamily="34" charset="-122"/>
                 <a:cs typeface="Be Vietnam Pro" pitchFamily="34" charset="-120"/>
               </a:rPr>
-              <a:t> công</a:t>
+              <a:t> dùng</a:t>
             </a:r>
             <a:r>
               <a:rPr lang="en-US" sz="2250" dirty="0" spc="4" kern="0">
-                <a:solidFill>
-                  <a:srgbClr val="C4C8D6"/>
-                </a:solidFill>
-                <a:latin typeface="Be Vietnam Pro" pitchFamily="34" charset="0"/>
-                <a:ea typeface="Be Vietnam Pro" pitchFamily="34" charset="-122"/>
-                <a:cs typeface="Be Vietnam Pro" pitchFamily="34" charset="-120"/>
-              </a:rPr>
-              <a:t> cụ</a:t>
-            </a:r>
-            <a:r>
-              <a:rPr lang="en-US" sz="2250" dirty="0" spc="5" kern="0">
-                <a:solidFill>
-                  <a:srgbClr val="C4C8D6"/>
-                </a:solidFill>
-                <a:latin typeface="Be Vietnam Pro" pitchFamily="34" charset="0"/>
-                <a:ea typeface="Be Vietnam Pro" pitchFamily="34" charset="-122"/>
-                <a:cs typeface="Be Vietnam Pro" pitchFamily="34" charset="-120"/>
-              </a:rPr>
-              <a:t> có</a:t>
-            </a:r>
-            <a:r>
-              <a:rPr lang="en-US" sz="2250" dirty="0" spc="-4" kern="0">
-                <a:solidFill>
-                  <a:srgbClr val="C4C8D6"/>
-                </a:solidFill>
-                <a:latin typeface="Be Vietnam Pro" pitchFamily="34" charset="0"/>
-                <a:ea typeface="Be Vietnam Pro" pitchFamily="34" charset="-122"/>
-                <a:cs typeface="Be Vietnam Pro" pitchFamily="34" charset="-120"/>
-              </a:rPr>
-              <a:t> sẵn,</a:t>
-            </a:r>
-            <a:r>
-              <a:rPr lang="en-US" sz="2250" dirty="0" spc="2" kern="0">
-                <a:solidFill>
-                  <a:srgbClr val="C4C8D6"/>
-                </a:solidFill>
-                <a:latin typeface="Be Vietnam Pro" pitchFamily="34" charset="0"/>
-                <a:ea typeface="Be Vietnam Pro" pitchFamily="34" charset="-122"/>
-                <a:cs typeface="Be Vietnam Pro" pitchFamily="34" charset="-120"/>
-              </a:rPr>
-              <a:t> dùng</a:t>
-            </a:r>
-            <a:r>
-              <a:rPr lang="en-US" sz="2250" dirty="0" spc="5" kern="0">
                 <a:solidFill>
                   <a:srgbClr val="C4C8D6"/>
                 </a:solidFill>
@@ -9555,59 +9489,15 @@
               <a:t> trên</a:t>
             </a:r>
             <a:r>
-              <a:rPr lang="en-US" sz="2550" dirty="0" spc="-4" kern="0">
-                <a:solidFill>
-                  <a:srgbClr val="14161C"/>
-                </a:solidFill>
-                <a:latin typeface="Be Vietnam Pro" pitchFamily="34" charset="0"/>
-                <a:ea typeface="Be Vietnam Pro" pitchFamily="34" charset="-122"/>
-                <a:cs typeface="Be Vietnam Pro" pitchFamily="34" charset="-120"/>
-              </a:rPr>
-              <a:t> Buildkite,</a:t>
-            </a:r>
-            <a:r>
-              <a:rPr lang="en-US" sz="2550" dirty="0" spc="1" kern="0">
-                <a:solidFill>
-                  <a:srgbClr val="14161C"/>
-                </a:solidFill>
-                <a:latin typeface="Be Vietnam Pro" pitchFamily="34" charset="0"/>
-                <a:ea typeface="Be Vietnam Pro" pitchFamily="34" charset="-122"/>
-                <a:cs typeface="Be Vietnam Pro" pitchFamily="34" charset="-120"/>
-              </a:rPr>
-              <a:t> công</a:t>
-            </a:r>
-            <a:r>
-              <a:rPr lang="en-US" sz="2550" dirty="0" spc="-2" kern="0">
-                <a:solidFill>
-                  <a:srgbClr val="14161C"/>
-                </a:solidFill>
-                <a:latin typeface="Be Vietnam Pro" pitchFamily="34" charset="0"/>
-                <a:ea typeface="Be Vietnam Pro" pitchFamily="34" charset="-122"/>
-                <a:cs typeface="Be Vietnam Pro" pitchFamily="34" charset="-120"/>
-              </a:rPr>
-              <a:t> cụ</a:t>
-            </a:r>
-            <a:r>
-              <a:rPr lang="en-US" sz="2550" dirty="0" spc="0" kern="0">
-                <a:solidFill>
-                  <a:srgbClr val="14161C"/>
-                </a:solidFill>
-                <a:latin typeface="Be Vietnam Pro" pitchFamily="34" charset="0"/>
-                <a:ea typeface="Be Vietnam Pro" pitchFamily="34" charset="-122"/>
-                <a:cs typeface="Be Vietnam Pro" pitchFamily="34" charset="-120"/>
-              </a:rPr>
-              <a:t> có</a:t>
-            </a:r>
-            <a:r>
-              <a:rPr lang="en-US" sz="2550" dirty="0" spc="-5" kern="0">
-                <a:solidFill>
-                  <a:srgbClr val="14161C"/>
-                </a:solidFill>
-                <a:latin typeface="Be Vietnam Pro" pitchFamily="34" charset="0"/>
-                <a:ea typeface="Be Vietnam Pro" pitchFamily="34" charset="-122"/>
-                <a:cs typeface="Be Vietnam Pro" pitchFamily="34" charset="-120"/>
-              </a:rPr>
-              <a:t> sẵn.</a:t>
+              <a:rPr lang="en-US" sz="2550" dirty="0" spc="-3" kern="0">
+                <a:solidFill>
+                  <a:srgbClr val="14161C"/>
+                </a:solidFill>
+                <a:latin typeface="Be Vietnam Pro" pitchFamily="34" charset="0"/>
+                <a:ea typeface="Be Vietnam Pro" pitchFamily="34" charset="-122"/>
+                <a:cs typeface="Be Vietnam Pro" pitchFamily="34" charset="-120"/>
+              </a:rPr>
+              <a:t> Buildkite.</a:t>
             </a:r>
             <a:endParaRPr lang="en-US" sz="2550" dirty="0"/>
           </a:p>
@@ -12038,37 +11928,70 @@
               <a:buChar char="•"/>
             </a:pPr>
             <a:r>
-              <a:rPr lang="en-US" sz="2700" dirty="0" spc="-28" kern="0">
-                <a:solidFill>
-                  <a:srgbClr val="14161C"/>
-                </a:solidFill>
-                <a:latin typeface="Be Vietnam Pro" pitchFamily="34" charset="0"/>
-                <a:ea typeface="Be Vietnam Pro" pitchFamily="34" charset="-122"/>
-                <a:cs typeface="Be Vietnam Pro" pitchFamily="34" charset="-120"/>
-              </a:rPr>
-              <a:t>NullAway,</a:t>
-            </a:r>
-            <a:r>
-              <a:rPr lang="en-US" sz="2700" dirty="0" spc="0" kern="0">
-                <a:solidFill>
-                  <a:srgbClr val="14161C"/>
-                </a:solidFill>
-                <a:latin typeface="Be Vietnam Pro" pitchFamily="34" charset="0"/>
-                <a:ea typeface="Be Vietnam Pro" pitchFamily="34" charset="-122"/>
-                <a:cs typeface="Be Vietnam Pro" pitchFamily="34" charset="-120"/>
-              </a:rPr>
-              <a:t> NEAL,</a:t>
-            </a:r>
-            <a:r>
-              <a:rPr lang="en-US" sz="2700" dirty="0" spc="-16" kern="0">
-                <a:solidFill>
-                  <a:srgbClr val="14161C"/>
-                </a:solidFill>
-                <a:latin typeface="Be Vietnam Pro" pitchFamily="34" charset="0"/>
-                <a:ea typeface="Be Vietnam Pro" pitchFamily="34" charset="-122"/>
-                <a:cs typeface="Be Vietnam Pro" pitchFamily="34" charset="-120"/>
-              </a:rPr>
-              <a:t> Piranha</a:t>
+              <a:rPr lang="en-US" sz="2700" dirty="0" spc="2" kern="0">
+                <a:solidFill>
+                  <a:srgbClr val="14161C"/>
+                </a:solidFill>
+                <a:latin typeface="Be Vietnam Pro" pitchFamily="34" charset="0"/>
+                <a:ea typeface="Be Vietnam Pro" pitchFamily="34" charset="-122"/>
+                <a:cs typeface="Be Vietnam Pro" pitchFamily="34" charset="-120"/>
+              </a:rPr>
+              <a:t>Mã</a:t>
+            </a:r>
+            <a:r>
+              <a:rPr lang="en-US" sz="2700" dirty="0" spc="-5" kern="0">
+                <a:solidFill>
+                  <a:srgbClr val="14161C"/>
+                </a:solidFill>
+                <a:latin typeface="Be Vietnam Pro" pitchFamily="34" charset="0"/>
+                <a:ea typeface="Be Vietnam Pro" pitchFamily="34" charset="-122"/>
+                <a:cs typeface="Be Vietnam Pro" pitchFamily="34" charset="-120"/>
+              </a:rPr>
+              <a:t> sạch:</a:t>
+            </a:r>
+            <a:r>
+              <a:rPr lang="en-US" sz="2700" dirty="0" spc="-2" kern="0">
+                <a:solidFill>
+                  <a:srgbClr val="14161C"/>
+                </a:solidFill>
+                <a:latin typeface="Be Vietnam Pro" pitchFamily="34" charset="0"/>
+                <a:ea typeface="Be Vietnam Pro" pitchFamily="34" charset="-122"/>
+                <a:cs typeface="Be Vietnam Pro" pitchFamily="34" charset="-120"/>
+              </a:rPr>
+              <a:t> nguồn không</a:t>
+            </a:r>
+            <a:r>
+              <a:rPr lang="en-US" sz="2700" dirty="0" spc="-3" kern="0">
+                <a:solidFill>
+                  <a:srgbClr val="14161C"/>
+                </a:solidFill>
+                <a:latin typeface="Be Vietnam Pro" pitchFamily="34" charset="0"/>
+                <a:ea typeface="Be Vietnam Pro" pitchFamily="34" charset="-122"/>
+                <a:cs typeface="Be Vietnam Pro" pitchFamily="34" charset="-120"/>
+              </a:rPr>
+              <a:t> nói</a:t>
+            </a:r>
+            <a:r>
+              <a:rPr lang="en-US" sz="2700" dirty="0" spc="-2" kern="0">
+                <a:solidFill>
+                  <a:srgbClr val="14161C"/>
+                </a:solidFill>
+                <a:latin typeface="Be Vietnam Pro" pitchFamily="34" charset="0"/>
+                <a:ea typeface="Be Vietnam Pro" pitchFamily="34" charset="-122"/>
+                <a:cs typeface="Be Vietnam Pro" pitchFamily="34" charset="-120"/>
+              </a:rPr>
+              <a:t> ai</a:t>
+            </a:r>
+            <a:r>
+              <a:rPr lang="en-US" sz="2700" dirty="0" spc="-5" kern="0">
+                <a:solidFill>
+                  <a:srgbClr val="14161C"/>
+                </a:solidFill>
+                <a:latin typeface="Be Vietnam Pro" pitchFamily="34" charset="0"/>
+                <a:ea typeface="Be Vietnam Pro" pitchFamily="34" charset="-122"/>
+                <a:cs typeface="Be Vietnam Pro" pitchFamily="34" charset="-120"/>
+              </a:rPr>
+              <a:t> viết</a:t>
             </a:r>
             <a:endParaRPr lang="en-US" sz="2700" dirty="0"/>
           </a:p>
